--- a/docs/graphrlm_pitch.pptx
+++ b/docs/graphrlm_pitch.pptx
@@ -788,7 +788,7 @@
           <a:lstStyle/>
           <a:p>
             <a:r>
-              <a:t>~45 сек. Связка качество+цена. Цифры с полных 500 кейсов — надёжные. Не уходи в F1 против text-RLM (незначимо, n=60). Здесь — только абсолютные числа против внешних бейзлайнов.</a:t>
+              <a:t>~45 сек. Связка качество+цена. Цифры v2 на полных 500 кейсах (EM 0.522, F1 0.639) — надёжные сами по себе. ОСТОРОЖНО: сравнение с публичными LLM — directional (разные протоколы оценки MuSiQue), держи звёздочку и НЕ делай 'в 1.4 раза точнее Gemini' главным лозунгом — грамотный человек спросит про идентичность сеттинга. Не уходи в F1 против text-RLM (незначимо, n=60).</a:t>
             </a:r>
           </a:p>
         </p:txBody>
@@ -4926,7 +4926,7 @@
         </p:nvGraphicFramePr>
         <p:xfrm>
           <a:off x="1280160" y="1920240"/>
-          <a:ext cx="9601200" cy="1371600"/>
+          <a:ext cx="9601200" cy="1828800"/>
         </p:xfrm>
         <a:graphic>
           <a:graphicData uri="http://schemas.openxmlformats.org/drawingml/2006/table">
@@ -4953,7 +4953,7 @@
                           </a:solidFill>
                           <a:latin typeface="Segoe UI"/>
                         </a:rPr>
-                        <a:t>Метрика (500 кейсов, zero-shot)</a:t>
+                        <a:t>Метрика (500 кейсов, zero-shot, v2)</a:t>
                       </a:r>
                     </a:p>
                   </a:txBody>
@@ -5089,6 +5089,77 @@
                     <a:p>
                       <a:pPr algn="l"/>
                       <a:r>
+                        <a:rPr sz="1400" b="1">
+                          <a:solidFill>
+                            <a:srgbClr val="9ADBB4"/>
+                          </a:solidFill>
+                          <a:latin typeface="Segoe UI"/>
+                        </a:rPr>
+                        <a:t>Полнота ответа (F1)</a:t>
+                      </a:r>
+                    </a:p>
+                  </a:txBody>
+                  <a:tcPr marL="109728" marR="109728" marT="36576" marB="36576" anchor="ctr">
+                    <a:solidFill>
+                      <a:srgbClr val="20301F"/>
+                    </a:solidFill>
+                  </a:tcPr>
+                </a:tc>
+                <a:tc>
+                  <a:txBody>
+                    <a:bodyPr wrap="square"/>
+                    <a:lstStyle/>
+                    <a:p>
+                      <a:pPr algn="r"/>
+                      <a:r>
+                        <a:rPr sz="1400" b="1">
+                          <a:solidFill>
+                            <a:srgbClr val="9ADBB4"/>
+                          </a:solidFill>
+                          <a:latin typeface="Segoe UI"/>
+                        </a:rPr>
+                        <a:t>0.64</a:t>
+                      </a:r>
+                    </a:p>
+                  </a:txBody>
+                  <a:tcPr marL="109728" marR="109728" marT="36576" marB="36576" anchor="ctr">
+                    <a:solidFill>
+                      <a:srgbClr val="20301F"/>
+                    </a:solidFill>
+                  </a:tcPr>
+                </a:tc>
+                <a:tc>
+                  <a:txBody>
+                    <a:bodyPr wrap="square"/>
+                    <a:lstStyle/>
+                    <a:p>
+                      <a:pPr algn="r"/>
+                      <a:r>
+                        <a:rPr sz="1400" b="1">
+                          <a:solidFill>
+                            <a:srgbClr val="9ADBB4"/>
+                          </a:solidFill>
+                          <a:latin typeface="Segoe UI"/>
+                        </a:rPr>
+                        <a:t>~0.45</a:t>
+                      </a:r>
+                    </a:p>
+                  </a:txBody>
+                  <a:tcPr marL="109728" marR="109728" marT="36576" marB="36576" anchor="ctr">
+                    <a:solidFill>
+                      <a:srgbClr val="20301F"/>
+                    </a:solidFill>
+                  </a:tcPr>
+                </a:tc>
+              </a:tr>
+              <a:tr h="457200">
+                <a:tc>
+                  <a:txBody>
+                    <a:bodyPr wrap="square"/>
+                    <a:lstStyle/>
+                    <a:p>
+                      <a:pPr algn="l"/>
+                      <a:r>
                         <a:rPr sz="1400" b="0">
                           <a:solidFill>
                             <a:srgbClr val="E8EAF0"/>
@@ -5164,7 +5235,7 @@
         </p:nvSpPr>
         <p:spPr>
           <a:xfrm>
-            <a:off x="822960" y="4206240"/>
+            <a:off x="822960" y="4480560"/>
             <a:ext cx="10515600" cy="2011680"/>
           </a:xfrm>
           <a:prstGeom prst="rect">
@@ -5193,7 +5264,7 @@
                 </a:solidFill>
                 <a:latin typeface="Segoe UI"/>
               </a:rPr>
-              <a:t>•  Точность ответа в 1.4 раза выше публичных LLM-бейзлайнов — на дешёвой модели.</a:t>
+              <a:t>•  Точность и полнота ответа в ~1.4 раза выше публичных LLM-бейзлайнов — на дешёвой модели.</a:t>
             </a:r>
           </a:p>
           <a:p>

--- a/docs/graphrlm_pitch.pptx
+++ b/docs/graphrlm_pitch.pptx
@@ -3998,7 +3998,7 @@
                 </a:solidFill>
                 <a:latin typeface="Segoe UI"/>
               </a:rPr>
-              <a:t>Слой проверки полноты доказательств для AI-research —</a:t>
+              <a:t>Достаёт недостающие звенья доказательной цепочки в контекст AI-research —</a:t>
             </a:r>
           </a:p>
           <a:p>
@@ -4165,7 +4165,7 @@
                 </a:solidFill>
                 <a:latin typeface="Segoe UI"/>
               </a:rPr>
-              <a:t>•  Все меряют точность ответа. Полноту доказательной базы не меряет никто.</a:t>
+              <a:t>•  Все измеряют точность ответа. Полноту доказательной базы — никто.</a:t>
             </a:r>
           </a:p>
           <a:p>
@@ -4226,7 +4226,7 @@
                 </a:solidFill>
                 <a:latin typeface="Segoe UI"/>
               </a:rPr>
-              <a:t>Мы первыми сделали полноту измеримой метрикой — и научились её гарантировать.</a:t>
+              <a:t>Мы не просто измеряем полноту — мы достаём в контекст именно то доказательство, которого не хватает.</a:t>
             </a:r>
           </a:p>
         </p:txBody>
@@ -4294,7 +4294,7 @@
                 </a:solidFill>
                 <a:latin typeface="Segoe UI"/>
               </a:rPr>
-              <a:t>Решение: дешёвый аудит полноты + дорогой поиск по триггеру</a:t>
+              <a:t>Решение: дёшево находим пробел — дорого закрываем, только где он есть</a:t>
             </a:r>
           </a:p>
         </p:txBody>
